--- a/raw-combo-figs/WJ-90-IS-Combo.pptx
+++ b/raw-combo-figs/WJ-90-IS-Combo.pptx
@@ -104,6 +104,11 @@
       </a:defRPr>
     </a:lvl9pPr>
   </p:defaultTextStyle>
+  <p:extLst>
+    <p:ext uri="{EFAFB233-063F-42B5-8137-9DF3F51BA10A}">
+      <p15:sldGuideLst xmlns:p15="http://schemas.microsoft.com/office/powerpoint/2012/main"/>
+    </p:ext>
+  </p:extLst>
 </p:presentation>
 </file>
 
@@ -3331,10 +3336,10 @@
       </p:grpSpPr>
       <p:pic>
         <p:nvPicPr>
-          <p:cNvPr id="11" name="Picture 10">
-            <a:extLst>
-              <a:ext uri="{FF2B5EF4-FFF2-40B4-BE49-F238E27FC236}">
-                <a16:creationId xmlns:a16="http://schemas.microsoft.com/office/drawing/2014/main" id="{0D381B3A-DFEB-C07A-9C40-969337C87BCD}"/>
+          <p:cNvPr id="5" name="Picture 4">
+            <a:extLst>
+              <a:ext uri="{FF2B5EF4-FFF2-40B4-BE49-F238E27FC236}">
+                <a16:creationId xmlns:a16="http://schemas.microsoft.com/office/drawing/2014/main" id="{EF57A253-600B-DEC9-F142-17A67C62E119}"/>
               </a:ext>
             </a:extLst>
           </p:cNvPr>
@@ -3345,6 +3350,36 @@
         </p:nvPicPr>
         <p:blipFill>
           <a:blip r:embed="rId2"/>
+          <a:stretch>
+            <a:fillRect/>
+          </a:stretch>
+        </p:blipFill>
+        <p:spPr>
+          <a:xfrm>
+            <a:off x="1583590" y="3671314"/>
+            <a:ext cx="3827019" cy="2553469"/>
+          </a:xfrm>
+          <a:prstGeom prst="rect">
+            <a:avLst/>
+          </a:prstGeom>
+        </p:spPr>
+      </p:pic>
+      <p:pic>
+        <p:nvPicPr>
+          <p:cNvPr id="11" name="Picture 10">
+            <a:extLst>
+              <a:ext uri="{FF2B5EF4-FFF2-40B4-BE49-F238E27FC236}">
+                <a16:creationId xmlns:a16="http://schemas.microsoft.com/office/drawing/2014/main" id="{0D381B3A-DFEB-C07A-9C40-969337C87BCD}"/>
+              </a:ext>
+            </a:extLst>
+          </p:cNvPr>
+          <p:cNvPicPr>
+            <a:picLocks noChangeAspect="1"/>
+          </p:cNvPicPr>
+          <p:nvPr/>
+        </p:nvPicPr>
+        <p:blipFill>
+          <a:blip r:embed="rId3"/>
           <a:stretch>
             <a:fillRect/>
           </a:stretch>
@@ -3374,7 +3409,7 @@
           <p:nvPr/>
         </p:nvPicPr>
         <p:blipFill>
-          <a:blip r:embed="rId3"/>
+          <a:blip r:embed="rId4"/>
           <a:stretch>
             <a:fillRect/>
           </a:stretch>
@@ -3560,36 +3595,6 @@
           <p:nvPr/>
         </p:nvPicPr>
         <p:blipFill>
-          <a:blip r:embed="rId4"/>
-          <a:stretch>
-            <a:fillRect/>
-          </a:stretch>
-        </p:blipFill>
-        <p:spPr>
-          <a:xfrm>
-            <a:off x="1583590" y="3671316"/>
-            <a:ext cx="3815618" cy="2545862"/>
-          </a:xfrm>
-          <a:prstGeom prst="rect">
-            <a:avLst/>
-          </a:prstGeom>
-        </p:spPr>
-      </p:pic>
-      <p:pic>
-        <p:nvPicPr>
-          <p:cNvPr id="5" name="Picture 4">
-            <a:extLst>
-              <a:ext uri="{FF2B5EF4-FFF2-40B4-BE49-F238E27FC236}">
-                <a16:creationId xmlns:a16="http://schemas.microsoft.com/office/drawing/2014/main" id="{EF57A253-600B-DEC9-F142-17A67C62E119}"/>
-              </a:ext>
-            </a:extLst>
-          </p:cNvPr>
-          <p:cNvPicPr>
-            <a:picLocks noChangeAspect="1"/>
-          </p:cNvPicPr>
-          <p:nvPr/>
-        </p:nvPicPr>
-        <p:blipFill>
           <a:blip r:embed="rId5"/>
           <a:stretch>
             <a:fillRect/>
@@ -3597,8 +3602,8 @@
         </p:blipFill>
         <p:spPr>
           <a:xfrm>
-            <a:off x="6791276" y="3671316"/>
-            <a:ext cx="3827019" cy="2553469"/>
+            <a:off x="6796976" y="3652022"/>
+            <a:ext cx="3815618" cy="2545862"/>
           </a:xfrm>
           <a:prstGeom prst="rect">
             <a:avLst/>
